--- a/docs/roles/Role_Frontend.pptx
+++ b/docs/roles/Role_Frontend.pptx
@@ -3295,6 +3295,41 @@
         </p:nvSpPr>
         <p:spPr>
           <a:xfrm>
+            <a:off x="548640" y="3931920"/>
+            <a:ext cx="10972800" cy="548640"/>
+          </a:xfrm>
+          <a:prstGeom prst="rect">
+            <a:avLst/>
+          </a:prstGeom>
+          <a:noFill/>
+        </p:spPr>
+        <p:txBody>
+          <a:bodyPr wrap="square" lIns="73152" rIns="73152" tIns="36576" bIns="36576" anchor="t">
+            <a:spAutoFit/>
+          </a:bodyPr>
+          <a:lstStyle/>
+          <a:p>
+            <a:pPr algn="l"/>
+            <a:r>
+              <a:rPr sz="1800" b="1">
+                <a:solidFill>
+                  <a:srgbClr val="FFFFFF"/>
+                </a:solidFill>
+                <a:latin typeface="나눔스퀘어라운드"/>
+              </a:rPr>
+              <a:t>담당  윤재영 (dsadsa2311245)</a:t>
+            </a:r>
+          </a:p>
+        </p:txBody>
+      </p:sp>
+      <p:sp>
+        <p:nvSpPr>
+          <p:cNvPr id="8" name="TextBox 7"/>
+          <p:cNvSpPr txBox="1"/>
+          <p:nvPr/>
+        </p:nvSpPr>
+        <p:spPr>
+          <a:xfrm>
             <a:off x="548640" y="5943600"/>
             <a:ext cx="10972800" cy="365760"/>
           </a:xfrm>
@@ -3317,7 +3352,7 @@
                 </a:solidFill>
                 <a:latin typeface="나눔스퀘어라운드"/>
               </a:rPr>
-              <a:t>2026-06-02 · LG DX School 5기 · 5분 대기조 · v1.0</a:t>
+              <a:t>2026-06-02 · LG DX School 5기 · 5분 대기조 · v1.1</a:t>
             </a:r>
           </a:p>
         </p:txBody>
